--- a/src/CmdPalTranslator/Assets/screenshots/screenshots.pptx
+++ b/src/CmdPalTranslator/Assets/screenshots/screenshots.pptx
@@ -5,10 +5,10 @@
     <p:sldMasterId id="2147483660" r:id="rId1"/>
   </p:sldMasterIdLst>
   <p:sldIdLst>
-    <p:sldId id="256" r:id="rId2"/>
-    <p:sldId id="257" r:id="rId3"/>
-    <p:sldId id="258" r:id="rId4"/>
-    <p:sldId id="259" r:id="rId5"/>
+    <p:sldId id="257" r:id="rId2"/>
+    <p:sldId id="258" r:id="rId3"/>
+    <p:sldId id="259" r:id="rId4"/>
+    <p:sldId id="256" r:id="rId5"/>
   </p:sldIdLst>
   <p:sldSz cx="13011150" cy="7315200"/>
   <p:notesSz cx="6858000" cy="9144000"/>
@@ -107,6 +107,11 @@
       </a:defRPr>
     </a:lvl9pPr>
   </p:defaultTextStyle>
+  <p:extLst>
+    <p:ext uri="{EFAFB233-063F-42B5-8137-9DF3F51BA10A}">
+      <p15:sldGuideLst xmlns:p15="http://schemas.microsoft.com/office/powerpoint/2012/main"/>
+    </p:ext>
+  </p:extLst>
 </p:presentation>
 </file>
 
@@ -144,7 +149,7 @@
           <a:p>
             <a:fld id="{4F7DEB2E-7EF1-4B1D-B42E-16807C5F4945}" type="datetimeFigureOut">
               <a:rPr lang="zh-TW" altLang="en-US" smtClean="0"/>
-              <a:t>2026/06/09</a:t>
+              <a:t>2026/06/10</a:t>
             </a:fld>
             <a:endParaRPr lang="zh-TW" altLang="en-US"/>
           </a:p>
@@ -360,7 +365,7 @@
           <a:p>
             <a:fld id="{4F7DEB2E-7EF1-4B1D-B42E-16807C5F4945}" type="datetimeFigureOut">
               <a:rPr lang="zh-TW" altLang="en-US" smtClean="0"/>
-              <a:t>2026/06/09</a:t>
+              <a:t>2026/06/10</a:t>
             </a:fld>
             <a:endParaRPr lang="zh-TW" altLang="en-US"/>
           </a:p>
@@ -757,66 +762,6 @@
       </p:grpSpPr>
       <p:pic>
         <p:nvPicPr>
-          <p:cNvPr id="9" name="圖片 8">
-            <a:extLst>
-              <a:ext uri="{FF2B5EF4-FFF2-40B4-BE49-F238E27FC236}">
-                <a16:creationId xmlns:a16="http://schemas.microsoft.com/office/drawing/2014/main" id="{DC74BAB6-282E-1EC9-39A3-4ABF551B794E}"/>
-              </a:ext>
-            </a:extLst>
-          </p:cNvPr>
-          <p:cNvPicPr>
-            <a:picLocks noChangeAspect="1"/>
-          </p:cNvPicPr>
-          <p:nvPr/>
-        </p:nvPicPr>
-        <p:blipFill>
-          <a:blip r:embed="rId2"/>
-          <a:stretch>
-            <a:fillRect/>
-          </a:stretch>
-        </p:blipFill>
-        <p:spPr>
-          <a:xfrm>
-            <a:off x="1480436" y="4252"/>
-            <a:ext cx="10050278" cy="7306695"/>
-          </a:xfrm>
-          <a:prstGeom prst="rect">
-            <a:avLst/>
-          </a:prstGeom>
-        </p:spPr>
-      </p:pic>
-    </p:spTree>
-    <p:extLst>
-      <p:ext uri="{BB962C8B-B14F-4D97-AF65-F5344CB8AC3E}">
-        <p14:creationId xmlns:p14="http://schemas.microsoft.com/office/powerpoint/2010/main" val="3643359247"/>
-      </p:ext>
-    </p:extLst>
-  </p:cSld>
-  <p:clrMapOvr>
-    <a:masterClrMapping/>
-  </p:clrMapOvr>
-</p:sld>
-</file>
-
-<file path=ppt/slides/slide2.xml><?xml version="1.0" encoding="utf-8"?>
-<p:sld xmlns:a="http://schemas.openxmlformats.org/drawingml/2006/main" xmlns:r="http://schemas.openxmlformats.org/officeDocument/2006/relationships" xmlns:p="http://schemas.openxmlformats.org/presentationml/2006/main">
-  <p:cSld>
-    <p:spTree>
-      <p:nvGrpSpPr>
-        <p:cNvPr id="1" name=""/>
-        <p:cNvGrpSpPr/>
-        <p:nvPr/>
-      </p:nvGrpSpPr>
-      <p:grpSpPr>
-        <a:xfrm>
-          <a:off x="0" y="0"/>
-          <a:ext cx="0" cy="0"/>
-          <a:chOff x="0" y="0"/>
-          <a:chExt cx="0" cy="0"/>
-        </a:xfrm>
-      </p:grpSpPr>
-      <p:pic>
-        <p:nvPicPr>
           <p:cNvPr id="3" name="圖片 2">
             <a:extLst>
               <a:ext uri="{FF2B5EF4-FFF2-40B4-BE49-F238E27FC236}">
@@ -858,7 +803,7 @@
 </p:sld>
 </file>
 
-<file path=ppt/slides/slide3.xml><?xml version="1.0" encoding="utf-8"?>
+<file path=ppt/slides/slide2.xml><?xml version="1.0" encoding="utf-8"?>
 <p:sld xmlns:a="http://schemas.openxmlformats.org/drawingml/2006/main" xmlns:r="http://schemas.openxmlformats.org/officeDocument/2006/relationships" xmlns:p="http://schemas.openxmlformats.org/presentationml/2006/main">
   <p:cSld>
     <p:spTree>
@@ -918,7 +863,7 @@
 </p:sld>
 </file>
 
-<file path=ppt/slides/slide4.xml><?xml version="1.0" encoding="utf-8"?>
+<file path=ppt/slides/slide3.xml><?xml version="1.0" encoding="utf-8"?>
 <p:sld xmlns:a="http://schemas.openxmlformats.org/drawingml/2006/main" xmlns:r="http://schemas.openxmlformats.org/officeDocument/2006/relationships" xmlns:p="http://schemas.openxmlformats.org/presentationml/2006/main">
   <p:cSld>
     <p:spTree>
@@ -969,6 +914,66 @@
     <p:extLst>
       <p:ext uri="{BB962C8B-B14F-4D97-AF65-F5344CB8AC3E}">
         <p14:creationId xmlns:p14="http://schemas.microsoft.com/office/powerpoint/2010/main" val="255293803"/>
+      </p:ext>
+    </p:extLst>
+  </p:cSld>
+  <p:clrMapOvr>
+    <a:masterClrMapping/>
+  </p:clrMapOvr>
+</p:sld>
+</file>
+
+<file path=ppt/slides/slide4.xml><?xml version="1.0" encoding="utf-8"?>
+<p:sld xmlns:a="http://schemas.openxmlformats.org/drawingml/2006/main" xmlns:r="http://schemas.openxmlformats.org/officeDocument/2006/relationships" xmlns:p="http://schemas.openxmlformats.org/presentationml/2006/main">
+  <p:cSld>
+    <p:spTree>
+      <p:nvGrpSpPr>
+        <p:cNvPr id="1" name=""/>
+        <p:cNvGrpSpPr/>
+        <p:nvPr/>
+      </p:nvGrpSpPr>
+      <p:grpSpPr>
+        <a:xfrm>
+          <a:off x="0" y="0"/>
+          <a:ext cx="0" cy="0"/>
+          <a:chOff x="0" y="0"/>
+          <a:chExt cx="0" cy="0"/>
+        </a:xfrm>
+      </p:grpSpPr>
+      <p:pic>
+        <p:nvPicPr>
+          <p:cNvPr id="9" name="圖片 8">
+            <a:extLst>
+              <a:ext uri="{FF2B5EF4-FFF2-40B4-BE49-F238E27FC236}">
+                <a16:creationId xmlns:a16="http://schemas.microsoft.com/office/drawing/2014/main" id="{DC74BAB6-282E-1EC9-39A3-4ABF551B794E}"/>
+              </a:ext>
+            </a:extLst>
+          </p:cNvPr>
+          <p:cNvPicPr>
+            <a:picLocks noChangeAspect="1"/>
+          </p:cNvPicPr>
+          <p:nvPr/>
+        </p:nvPicPr>
+        <p:blipFill>
+          <a:blip r:embed="rId2"/>
+          <a:stretch>
+            <a:fillRect/>
+          </a:stretch>
+        </p:blipFill>
+        <p:spPr>
+          <a:xfrm>
+            <a:off x="1822183" y="252707"/>
+            <a:ext cx="9366785" cy="6809786"/>
+          </a:xfrm>
+          <a:prstGeom prst="rect">
+            <a:avLst/>
+          </a:prstGeom>
+        </p:spPr>
+      </p:pic>
+    </p:spTree>
+    <p:extLst>
+      <p:ext uri="{BB962C8B-B14F-4D97-AF65-F5344CB8AC3E}">
+        <p14:creationId xmlns:p14="http://schemas.microsoft.com/office/powerpoint/2010/main" val="3643359247"/>
       </p:ext>
     </p:extLst>
   </p:cSld>
